--- a/m4/diapositivos/aula-01-f01.pptx
+++ b/m4/diapositivos/aula-01-f01.pptx
@@ -3893,7 +3893,7 @@
       </p:sp>
       <p:pic>
         <p:nvPicPr>
-          <p:cNvPr id="15" name="Image 0" descr="/tmp/aulas-diap-SxDOZL/qr-1.png">    </p:cNvPr>
+          <p:cNvPr id="15" name="Image 0" descr="/tmp/aulas-diap-jdU3MK/qr-1.png">    </p:cNvPr>
           <p:cNvPicPr>
             <a:picLocks noChangeAspect="1"/>
           </p:cNvPicPr>
@@ -9842,7 +9842,7 @@
       </p:sp>
       <p:pic>
         <p:nvPicPr>
-          <p:cNvPr id="8" name="Image 0" descr="/tmp/aulas-diap-SxDOZL/qr-1-v21.png">    </p:cNvPr>
+          <p:cNvPr id="8" name="Image 0" descr="/tmp/aulas-diap-jdU3MK/qr-1-v21.png">    </p:cNvPr>
           <p:cNvPicPr>
             <a:picLocks noChangeAspect="1"/>
           </p:cNvPicPr>
@@ -13535,7 +13535,7 @@
       </p:sp>
       <p:pic>
         <p:nvPicPr>
-          <p:cNvPr id="11" name="Image 0" descr="/tmp/aulas-diap-SxDOZL/qr-1.png">    </p:cNvPr>
+          <p:cNvPr id="11" name="Image 0" descr="/tmp/aulas-diap-jdU3MK/qr-1.png">    </p:cNvPr>
           <p:cNvPicPr>
             <a:picLocks noChangeAspect="1"/>
           </p:cNvPicPr>
